--- a/assets/ml.pptx
+++ b/assets/ml.pptx
@@ -4325,25 +4325,6 @@
               <a:t>economists</a:t>
             </a:r>
             <a:endParaRPr lang="en-US" dirty="0"/>
-          </a:p>
-        </p:txBody>
-      </p:sp>
-      <p:sp>
-        <p:nvSpPr>
-          <p:cNvPr id="3" name="Subtitle 2"/>
-          <p:cNvSpPr>
-            <a:spLocks noGrp="1"/>
-          </p:cNvSpPr>
-          <p:nvPr>
-            <p:ph type="subTitle" idx="1"/>
-          </p:nvPr>
-        </p:nvSpPr>
-        <p:spPr/>
-        <p:txBody>
-          <a:bodyPr/>
-          <a:lstStyle/>
-          <a:p>
-            <a:endParaRPr lang="en-US"/>
           </a:p>
         </p:txBody>
       </p:sp>
@@ -5950,11 +5931,7 @@
             </a:r>
             <a:r>
               <a:rPr lang="nl-NL" dirty="0" smtClean="0"/>
-              <a:t> rest </a:t>
-            </a:r>
-            <a:r>
-              <a:rPr lang="nl-NL" dirty="0" smtClean="0"/>
-              <a:t>data</a:t>
+              <a:t> rest data</a:t>
             </a:r>
           </a:p>
           <a:p>
@@ -6173,11 +6150,7 @@
             </a:r>
             <a:r>
               <a:rPr lang="nl-NL" dirty="0" smtClean="0"/>
-              <a:t>out </a:t>
-            </a:r>
-            <a:r>
-              <a:rPr lang="nl-NL" dirty="0" smtClean="0"/>
-              <a:t>set</a:t>
+              <a:t>out set</a:t>
             </a:r>
             <a:endParaRPr lang="en-US" dirty="0"/>
           </a:p>
@@ -7489,11 +7462,7 @@
             </a:r>
             <a:r>
               <a:rPr lang="nl-NL" dirty="0" smtClean="0"/>
-              <a:t>ake a random sample of </a:t>
-            </a:r>
-            <a:r>
-              <a:rPr lang="nl-NL" dirty="0" smtClean="0"/>
-              <a:t>variables at </a:t>
+              <a:t>ake a random sample of variables at </a:t>
             </a:r>
             <a:r>
               <a:rPr lang="nl-NL" dirty="0" err="1" smtClean="0"/>
@@ -7503,7 +7472,6 @@
               <a:rPr lang="nl-NL" dirty="0" smtClean="0"/>
               <a:t> splits</a:t>
             </a:r>
-            <a:endParaRPr lang="nl-NL" dirty="0" smtClean="0"/>
           </a:p>
           <a:p>
             <a:r>
